--- a/PPT/Review-4.pptx
+++ b/PPT/Review-4.pptx
@@ -217,7 +217,7 @@
 <file path=ppt/revisionInfo.xml><?xml version="1.0" encoding="utf-8"?>
 <p1510:revInfo xmlns:a="http://schemas.openxmlformats.org/drawingml/2006/main" xmlns:r="http://schemas.openxmlformats.org/officeDocument/2006/relationships" xmlns:p1510="http://schemas.microsoft.com/office/powerpoint/2015/10/main">
   <p1510:revLst>
-    <p1510:client id="{FDE15685-B374-4AC2-965E-FEB2E5CD97A9}" v="31" dt="2025-12-22T14:52:28.778"/>
+    <p1510:client id="{9616B85C-2804-4004-8AC6-EDC395BA03A4}" v="4" dt="2026-01-18T12:23:20.183"/>
   </p1510:revLst>
 </p1510:revInfo>
 </file>
@@ -2570,7 +2570,7 @@
           <a:p>
             <a:fld id="{1D8BD707-D9CF-40AE-B4C6-C98DA3205C09}" type="datetimeFigureOut">
               <a:rPr lang="en-US"/>
-              <a:t>12/22/2025</a:t>
+              <a:t>1/18/2026</a:t>
             </a:fld>
             <a:endParaRPr lang="en-US"/>
           </a:p>
@@ -6293,8 +6293,8 @@
         </p:nvSpPr>
         <p:spPr bwMode="auto">
           <a:xfrm rot="10800000" flipV="1">
-            <a:off x="66039" y="1276799"/>
-            <a:ext cx="8706678" cy="3293209"/>
+            <a:off x="66039" y="1523019"/>
+            <a:ext cx="8706678" cy="2800767"/>
           </a:xfrm>
           <a:prstGeom prst="rect">
             <a:avLst/>
@@ -6376,74 +6376,13 @@
             </a:r>
           </a:p>
           <a:p>
-            <a:pPr marL="285750" marR="0" lvl="0" indent="-285750" algn="l" defTabSz="914400" rtl="0" eaLnBrk="0" fontAlgn="base" latinLnBrk="0" hangingPunct="0">
-              <a:lnSpc>
-                <a:spcPct val="100000"/>
-              </a:lnSpc>
+            <a:pPr lvl="1" eaLnBrk="0" fontAlgn="base" hangingPunct="0">
               <a:spcBef>
                 <a:spcPct val="0"/>
               </a:spcBef>
               <a:spcAft>
                 <a:spcPct val="0"/>
               </a:spcAft>
-              <a:buClrTx/>
-              <a:buSzTx/>
-              <a:buFont typeface="Wingdings" panose="05000000000000000000" pitchFamily="2" charset="2"/>
-              <a:buChar char="Ø"/>
-              <a:tabLst/>
-            </a:pPr>
-            <a:endParaRPr kumimoji="0" lang="en-US" altLang="en-US" sz="1600" b="0" i="0" u="none" strike="noStrike" cap="none" normalizeH="0" baseline="0" dirty="0">
-              <a:ln>
-                <a:noFill/>
-              </a:ln>
-              <a:solidFill>
-                <a:schemeClr val="accent2">
-                  <a:lumMod val="50000"/>
-                </a:schemeClr>
-              </a:solidFill>
-              <a:effectLst/>
-              <a:latin typeface="Times New Roman" panose="02020603050405020304" pitchFamily="18" charset="0"/>
-              <a:cs typeface="Times New Roman" panose="02020603050405020304" pitchFamily="18" charset="0"/>
-            </a:endParaRPr>
-          </a:p>
-          <a:p>
-            <a:pPr marL="742950" lvl="1" indent="-285750" eaLnBrk="0" fontAlgn="base" hangingPunct="0">
-              <a:spcBef>
-                <a:spcPct val="0"/>
-              </a:spcBef>
-              <a:spcAft>
-                <a:spcPct val="0"/>
-              </a:spcAft>
-              <a:buFont typeface="Arial" panose="020B0604020202020204" pitchFamily="34" charset="0"/>
-              <a:buChar char="•"/>
-            </a:pPr>
-            <a:r>
-              <a:rPr kumimoji="0" lang="en-US" altLang="en-US" sz="1600" b="0" i="0" u="none" strike="noStrike" cap="none" normalizeH="0" baseline="0" dirty="0">
-                <a:ln>
-                  <a:noFill/>
-                </a:ln>
-                <a:solidFill>
-                  <a:schemeClr val="accent2">
-                    <a:lumMod val="50000"/>
-                  </a:schemeClr>
-                </a:solidFill>
-                <a:effectLst/>
-                <a:latin typeface="Times New Roman" panose="02020603050405020304" pitchFamily="18" charset="0"/>
-                <a:cs typeface="Times New Roman" panose="02020603050405020304" pitchFamily="18" charset="0"/>
-              </a:rPr>
-              <a:t>Successful execution of NLP parsing for multiple text variations.</a:t>
-            </a:r>
-          </a:p>
-          <a:p>
-            <a:pPr marL="742950" lvl="1" indent="-285750" eaLnBrk="0" fontAlgn="base" hangingPunct="0">
-              <a:spcBef>
-                <a:spcPct val="0"/>
-              </a:spcBef>
-              <a:spcAft>
-                <a:spcPct val="0"/>
-              </a:spcAft>
-              <a:buFont typeface="Arial" panose="020B0604020202020204" pitchFamily="34" charset="0"/>
-              <a:buChar char="•"/>
             </a:pPr>
             <a:endParaRPr kumimoji="0" lang="en-US" altLang="en-US" sz="1600" b="0" i="0" u="none" strike="noStrike" cap="none" normalizeH="0" baseline="0" dirty="0">
               <a:ln>
@@ -7172,7 +7111,7 @@
                 <a:latin typeface="Times New Roman" panose="02020603050405020304" pitchFamily="18" charset="0"/>
                 <a:cs typeface="Times New Roman" panose="02020603050405020304" pitchFamily="18" charset="0"/>
               </a:rPr>
-              <a:t>User (Faculty) inputs text </a:t>
+              <a:t>User (Faculty) </a:t>
             </a:r>
             <a:r>
               <a:rPr lang="en-US" altLang="en-US" sz="1600" dirty="0">
@@ -7184,7 +7123,7 @@
                 <a:latin typeface="Times New Roman" panose="02020603050405020304" pitchFamily="18" charset="0"/>
                 <a:cs typeface="Times New Roman" panose="02020603050405020304" pitchFamily="18" charset="0"/>
               </a:rPr>
-              <a:t>	</a:t>
+              <a:t>Scans	      	QR Validation</a:t>
             </a:r>
             <a:r>
               <a:rPr kumimoji="0" lang="en-US" altLang="en-US" sz="1600" b="0" i="0" u="none" strike="noStrike" cap="none" normalizeH="0" baseline="0" dirty="0">
@@ -7200,7 +7139,7 @@
                 <a:latin typeface="Times New Roman" panose="02020603050405020304" pitchFamily="18" charset="0"/>
                 <a:cs typeface="Times New Roman" panose="02020603050405020304" pitchFamily="18" charset="0"/>
               </a:rPr>
-              <a:t>NLP Engine parses data 	API updates MongoDB 		Student Dashboard refreshes instantly via </a:t>
+              <a:t>		API updates MongoDB 		Student Dashboard refreshes instantly via </a:t>
             </a:r>
             <a:r>
               <a:rPr kumimoji="0" lang="en-US" altLang="en-US" sz="1600" b="0" i="0" u="none" strike="noStrike" cap="none" normalizeH="0" baseline="0" dirty="0" err="1">
@@ -7284,7 +7223,7 @@
         </p:nvCxnSpPr>
         <p:spPr>
           <a:xfrm>
-            <a:off x="3041375" y="3597965"/>
+            <a:off x="2842592" y="3607905"/>
             <a:ext cx="646043" cy="0"/>
           </a:xfrm>
           <a:prstGeom prst="straightConnector1">
@@ -7325,7 +7264,7 @@
         </p:nvCxnSpPr>
         <p:spPr>
           <a:xfrm>
-            <a:off x="5837583" y="3597965"/>
+            <a:off x="5290931" y="3607905"/>
             <a:ext cx="646043" cy="0"/>
           </a:xfrm>
           <a:prstGeom prst="straightConnector1">
@@ -7366,7 +7305,7 @@
         </p:nvCxnSpPr>
         <p:spPr>
           <a:xfrm>
-            <a:off x="1225828" y="3859695"/>
+            <a:off x="1066802" y="3899452"/>
             <a:ext cx="646043" cy="0"/>
           </a:xfrm>
           <a:prstGeom prst="straightConnector1">
@@ -7540,8 +7479,8 @@
         </p:nvSpPr>
         <p:spPr bwMode="auto">
           <a:xfrm rot="10800000" flipV="1">
-            <a:off x="66039" y="1294477"/>
-            <a:ext cx="8563611" cy="2554545"/>
+            <a:off x="66039" y="1786920"/>
+            <a:ext cx="8563611" cy="1569660"/>
           </a:xfrm>
           <a:prstGeom prst="rect">
             <a:avLst/>
@@ -7619,66 +7558,19 @@
                 <a:latin typeface="Times New Roman" panose="02020603050405020304" pitchFamily="18" charset="0"/>
                 <a:cs typeface="Times New Roman" panose="02020603050405020304" pitchFamily="18" charset="0"/>
               </a:rPr>
-              <a:t>Why not purely ML?</a:t>
-            </a:r>
-          </a:p>
-          <a:p>
-            <a:pPr marL="285750" marR="0" lvl="0" indent="-285750" algn="l" defTabSz="914400" rtl="0" eaLnBrk="0" fontAlgn="base" latinLnBrk="0" hangingPunct="0">
-              <a:lnSpc>
-                <a:spcPct val="100000"/>
-              </a:lnSpc>
-              <a:spcBef>
-                <a:spcPct val="0"/>
-              </a:spcBef>
-              <a:spcAft>
-                <a:spcPct val="0"/>
-              </a:spcAft>
-              <a:buClrTx/>
-              <a:buSzTx/>
-              <a:buFont typeface="Wingdings" panose="05000000000000000000" pitchFamily="2" charset="2"/>
-              <a:buChar char="Ø"/>
-              <a:tabLst/>
-            </a:pPr>
-            <a:endParaRPr kumimoji="0" lang="en-US" altLang="en-US" sz="1600" b="0" i="0" u="none" strike="noStrike" cap="none" normalizeH="0" baseline="0" dirty="0">
-              <a:ln>
-                <a:noFill/>
-              </a:ln>
-              <a:solidFill>
-                <a:schemeClr val="accent2">
-                  <a:lumMod val="50000"/>
-                </a:schemeClr>
-              </a:solidFill>
-              <a:effectLst/>
-              <a:latin typeface="Times New Roman" panose="02020603050405020304" pitchFamily="18" charset="0"/>
-              <a:cs typeface="Times New Roman" panose="02020603050405020304" pitchFamily="18" charset="0"/>
-            </a:endParaRPr>
-          </a:p>
-          <a:p>
-            <a:pPr marL="742950" lvl="1" indent="-285750" eaLnBrk="0" fontAlgn="base" hangingPunct="0">
-              <a:spcBef>
-                <a:spcPct val="0"/>
-              </a:spcBef>
-              <a:spcAft>
-                <a:spcPct val="0"/>
-              </a:spcAft>
-              <a:buFont typeface="Arial" panose="020B0604020202020204" pitchFamily="34" charset="0"/>
-              <a:buChar char="•"/>
-            </a:pPr>
-            <a:r>
-              <a:rPr kumimoji="0" lang="en-US" altLang="en-US" sz="1600" b="0" i="0" u="none" strike="noStrike" cap="none" normalizeH="0" baseline="0" dirty="0">
-                <a:ln>
-                  <a:noFill/>
-                </a:ln>
+              <a:t>Why QR over Biometrics?</a:t>
+            </a:r>
+            <a:r>
+              <a:rPr lang="en-US" altLang="en-US" sz="1600" b="1" dirty="0">
                 <a:solidFill>
                   <a:schemeClr val="accent2">
                     <a:lumMod val="50000"/>
                   </a:schemeClr>
                 </a:solidFill>
-                <a:effectLst/>
-                <a:latin typeface="Times New Roman" panose="02020603050405020304" pitchFamily="18" charset="0"/>
-                <a:cs typeface="Times New Roman" panose="02020603050405020304" pitchFamily="18" charset="0"/>
-              </a:rPr>
-              <a:t>Institutional systems require </a:t>
+                <a:latin typeface="Times New Roman" panose="02020603050405020304" pitchFamily="18" charset="0"/>
+                <a:cs typeface="Times New Roman" panose="02020603050405020304" pitchFamily="18" charset="0"/>
+              </a:rPr>
+              <a:t> </a:t>
             </a:r>
             <a:r>
               <a:rPr kumimoji="0" lang="en-US" altLang="en-US" sz="1600" b="1" i="0" u="none" strike="noStrike" cap="none" normalizeH="0" baseline="0" dirty="0">
@@ -7694,10 +7586,10 @@
                 <a:latin typeface="Times New Roman" panose="02020603050405020304" pitchFamily="18" charset="0"/>
                 <a:cs typeface="Times New Roman" panose="02020603050405020304" pitchFamily="18" charset="0"/>
               </a:rPr>
-              <a:t>deterministic accuracy</a:t>
-            </a:r>
-            <a:r>
-              <a:rPr kumimoji="0" lang="en-US" altLang="en-US" sz="1600" b="0" i="0" u="none" strike="noStrike" cap="none" normalizeH="0" baseline="0" dirty="0">
+              <a:t>Reason: </a:t>
+            </a:r>
+            <a:r>
+              <a:rPr kumimoji="0" lang="en-US" altLang="en-US" sz="1600" i="0" u="none" strike="noStrike" cap="none" normalizeH="0" baseline="0" dirty="0">
                 <a:ln>
                   <a:noFill/>
                 </a:ln>
@@ -7710,82 +7602,7 @@
                 <a:latin typeface="Times New Roman" panose="02020603050405020304" pitchFamily="18" charset="0"/>
                 <a:cs typeface="Times New Roman" panose="02020603050405020304" pitchFamily="18" charset="0"/>
               </a:rPr>
-              <a:t> (100% correct attendance logs); NLP provides flexible entry while Rule-Based logic ensures data reliability.</a:t>
-            </a:r>
-          </a:p>
-          <a:p>
-            <a:pPr marL="742950" lvl="1" indent="-285750" eaLnBrk="0" fontAlgn="base" hangingPunct="0">
-              <a:spcBef>
-                <a:spcPct val="0"/>
-              </a:spcBef>
-              <a:spcAft>
-                <a:spcPct val="0"/>
-              </a:spcAft>
-              <a:buFont typeface="Arial" panose="020B0604020202020204" pitchFamily="34" charset="0"/>
-              <a:buChar char="•"/>
-            </a:pPr>
-            <a:endParaRPr kumimoji="0" lang="en-US" altLang="en-US" sz="1600" b="0" i="0" u="none" strike="noStrike" cap="none" normalizeH="0" baseline="0" dirty="0">
-              <a:ln>
-                <a:noFill/>
-              </a:ln>
-              <a:solidFill>
-                <a:schemeClr val="accent2">
-                  <a:lumMod val="50000"/>
-                </a:schemeClr>
-              </a:solidFill>
-              <a:effectLst/>
-              <a:latin typeface="Times New Roman" panose="02020603050405020304" pitchFamily="18" charset="0"/>
-              <a:cs typeface="Times New Roman" panose="02020603050405020304" pitchFamily="18" charset="0"/>
-            </a:endParaRPr>
-          </a:p>
-          <a:p>
-            <a:pPr marL="285750" marR="0" lvl="0" indent="-285750" algn="l" defTabSz="914400" rtl="0" eaLnBrk="0" fontAlgn="base" latinLnBrk="0" hangingPunct="0">
-              <a:lnSpc>
-                <a:spcPct val="100000"/>
-              </a:lnSpc>
-              <a:spcBef>
-                <a:spcPct val="0"/>
-              </a:spcBef>
-              <a:spcAft>
-                <a:spcPct val="0"/>
-              </a:spcAft>
-              <a:buClrTx/>
-              <a:buSzTx/>
-              <a:buFont typeface="Wingdings" panose="05000000000000000000" pitchFamily="2" charset="2"/>
-              <a:buChar char="Ø"/>
-              <a:tabLst/>
-            </a:pPr>
-            <a:r>
-              <a:rPr kumimoji="0" lang="en-US" altLang="en-US" sz="1600" b="1" i="0" u="none" strike="noStrike" cap="none" normalizeH="0" baseline="0" dirty="0">
-                <a:ln>
-                  <a:noFill/>
-                </a:ln>
-                <a:solidFill>
-                  <a:schemeClr val="accent2">
-                    <a:lumMod val="50000"/>
-                  </a:schemeClr>
-                </a:solidFill>
-                <a:effectLst/>
-                <a:latin typeface="Times New Roman" panose="02020603050405020304" pitchFamily="18" charset="0"/>
-                <a:cs typeface="Times New Roman" panose="02020603050405020304" pitchFamily="18" charset="0"/>
-              </a:rPr>
-              <a:t>NLP over Buttons:</a:t>
-            </a:r>
-            <a:r>
-              <a:rPr kumimoji="0" lang="en-US" altLang="en-US" sz="1600" b="0" i="0" u="none" strike="noStrike" cap="none" normalizeH="0" baseline="0" dirty="0">
-                <a:ln>
-                  <a:noFill/>
-                </a:ln>
-                <a:solidFill>
-                  <a:schemeClr val="accent2">
-                    <a:lumMod val="50000"/>
-                  </a:schemeClr>
-                </a:solidFill>
-                <a:effectLst/>
-                <a:latin typeface="Times New Roman" panose="02020603050405020304" pitchFamily="18" charset="0"/>
-                <a:cs typeface="Times New Roman" panose="02020603050405020304" pitchFamily="18" charset="0"/>
-              </a:rPr>
-              <a:t> We chose NLP to simulate a natural conversation between Faculty and the system, reducing administrative "click-fatigue.“</a:t>
+              <a:t>Biometric hardware is expensive and prone to hygiene issues/maintenance; QR utilizes existing student hardware (smartphones) for a cost-effective, scalable solution.</a:t>
             </a:r>
           </a:p>
           <a:p>
@@ -8164,7 +7981,7 @@
                 <a:latin typeface="Times New Roman" panose="02020603050405020304" pitchFamily="18" charset="0"/>
                 <a:cs typeface="Times New Roman" panose="02020603050405020304" pitchFamily="18" charset="0"/>
               </a:rPr>
-              <a:t>Combines efficient data entry (QR/NLP) with motivational feedback (Leaderboards).</a:t>
+              <a:t>Combines efficient data entry (QR) with motivational feedback (Leaderboards).</a:t>
             </a:r>
           </a:p>
           <a:p>
@@ -9087,8 +8904,8 @@
         </p:nvSpPr>
         <p:spPr bwMode="auto">
           <a:xfrm rot="10800000" flipV="1">
-            <a:off x="0" y="1179724"/>
-            <a:ext cx="9147535" cy="3539430"/>
+            <a:off x="0" y="1302834"/>
+            <a:ext cx="9147535" cy="3293209"/>
           </a:xfrm>
           <a:prstGeom prst="rect">
             <a:avLst/>
@@ -9207,7 +9024,7 @@
                 <a:latin typeface="Times New Roman" panose="02020603050405020304" pitchFamily="18" charset="0"/>
                 <a:cs typeface="Times New Roman" panose="02020603050405020304" pitchFamily="18" charset="0"/>
               </a:rPr>
-              <a:t>To automate institutional attendance through seamless QR scanning and Natural Language Processing.</a:t>
+              <a:t>To automate institutional attendance through seamless QR scanning.</a:t>
             </a:r>
           </a:p>
           <a:p>
@@ -9384,7 +9201,7 @@
               <a:buChar char="•"/>
             </a:pPr>
             <a:r>
-              <a:rPr kumimoji="0" lang="en-US" altLang="en-US" sz="1600" b="1" i="0" u="none" strike="noStrike" cap="none" normalizeH="0" baseline="0" dirty="0">
+              <a:rPr kumimoji="0" lang="en-GB" altLang="en-US" sz="1600" b="1" i="0" u="none" strike="noStrike" cap="none" normalizeH="0" baseline="0" dirty="0">
                 <a:ln>
                   <a:noFill/>
                 </a:ln>
@@ -9397,10 +9214,10 @@
                 <a:latin typeface="Times New Roman" panose="02020603050405020304" pitchFamily="18" charset="0"/>
                 <a:cs typeface="Times New Roman" panose="02020603050405020304" pitchFamily="18" charset="0"/>
               </a:rPr>
-              <a:t>NLP Engine:</a:t>
-            </a:r>
-            <a:r>
-              <a:rPr kumimoji="0" lang="en-US" altLang="en-US" sz="1600" b="0" i="0" u="none" strike="noStrike" cap="none" normalizeH="0" baseline="0" dirty="0">
+              <a:t>Validation Engine: </a:t>
+            </a:r>
+            <a:r>
+              <a:rPr kumimoji="0" lang="en-GB" altLang="en-US" sz="1600" i="0" u="none" strike="noStrike" cap="none" normalizeH="0" baseline="0" dirty="0">
                 <a:ln>
                   <a:noFill/>
                 </a:ln>
@@ -9413,7 +9230,7 @@
                 <a:latin typeface="Times New Roman" panose="02020603050405020304" pitchFamily="18" charset="0"/>
                 <a:cs typeface="Times New Roman" panose="02020603050405020304" pitchFamily="18" charset="0"/>
               </a:rPr>
-              <a:t> For parsing unstructured faculty text commands into structured attendance logs.</a:t>
+              <a:t>For ensuring attendance authenticity and schedule alignment.</a:t>
             </a:r>
           </a:p>
           <a:p>
@@ -9699,7 +9516,7 @@
         <p:spPr bwMode="auto">
           <a:xfrm>
             <a:off x="250962" y="1294477"/>
-            <a:ext cx="7978637" cy="2800767"/>
+            <a:ext cx="7978637" cy="2554545"/>
           </a:xfrm>
           <a:prstGeom prst="rect">
             <a:avLst/>
@@ -9821,31 +9638,7 @@
                 <a:latin typeface="Times New Roman" panose="02020603050405020304" pitchFamily="18" charset="0"/>
                 <a:cs typeface="Times New Roman" panose="02020603050405020304" pitchFamily="18" charset="0"/>
               </a:rPr>
-              <a:t> QR Time-stamps, Manual Roll Call entries, NLP text strings (e.g., </a:t>
-            </a:r>
-            <a:r>
-              <a:rPr lang="en-GB" sz="1600" i="1" dirty="0">
-                <a:solidFill>
-                  <a:schemeClr val="accent2">
-                    <a:lumMod val="50000"/>
-                  </a:schemeClr>
-                </a:solidFill>
-                <a:latin typeface="Times New Roman" panose="02020603050405020304" pitchFamily="18" charset="0"/>
-                <a:cs typeface="Times New Roman" panose="02020603050405020304" pitchFamily="18" charset="0"/>
-              </a:rPr>
-              <a:t>"Roll 45 is absent"</a:t>
-            </a:r>
-            <a:r>
-              <a:rPr lang="en-GB" sz="1600" dirty="0">
-                <a:solidFill>
-                  <a:schemeClr val="accent2">
-                    <a:lumMod val="50000"/>
-                  </a:schemeClr>
-                </a:solidFill>
-                <a:latin typeface="Times New Roman" panose="02020603050405020304" pitchFamily="18" charset="0"/>
-                <a:cs typeface="Times New Roman" panose="02020603050405020304" pitchFamily="18" charset="0"/>
-              </a:rPr>
-              <a:t>).</a:t>
+              <a:t> QR Time-stamps, Manual Roll Call entries.</a:t>
             </a:r>
           </a:p>
           <a:p>
@@ -10852,8 +10645,8 @@
         </p:nvSpPr>
         <p:spPr bwMode="auto">
           <a:xfrm rot="10800000" flipV="1">
-            <a:off x="66039" y="1062570"/>
-            <a:ext cx="9077961" cy="3754874"/>
+            <a:off x="66039" y="1170293"/>
+            <a:ext cx="9077961" cy="3539430"/>
           </a:xfrm>
           <a:prstGeom prst="rect">
             <a:avLst/>
@@ -10983,7 +10776,7 @@
               <a:tabLst/>
             </a:pPr>
             <a:r>
-              <a:rPr kumimoji="0" lang="en-US" altLang="en-US" sz="1400" b="1" i="0" u="none" strike="noStrike" cap="none" normalizeH="0" baseline="0" dirty="0">
+              <a:rPr kumimoji="0" lang="en-GB" altLang="en-US" sz="1400" b="1" i="0" u="none" strike="noStrike" cap="none" normalizeH="0" baseline="0" dirty="0">
                 <a:ln>
                   <a:noFill/>
                 </a:ln>
@@ -10996,7 +10789,23 @@
                 <a:latin typeface="Times New Roman" panose="02020603050405020304" pitchFamily="18" charset="0"/>
                 <a:cs typeface="Times New Roman" panose="02020603050405020304" pitchFamily="18" charset="0"/>
               </a:rPr>
-              <a:t>Why use NLP for Attendance?</a:t>
+              <a:t>Algorithm Design: </a:t>
+            </a:r>
+            <a:r>
+              <a:rPr kumimoji="0" lang="en-GB" altLang="en-US" sz="1400" i="0" u="none" strike="noStrike" cap="none" normalizeH="0" baseline="0" dirty="0">
+                <a:ln>
+                  <a:noFill/>
+                </a:ln>
+                <a:solidFill>
+                  <a:schemeClr val="accent2">
+                    <a:lumMod val="50000"/>
+                  </a:schemeClr>
+                </a:solidFill>
+                <a:effectLst/>
+                <a:latin typeface="Times New Roman" panose="02020603050405020304" pitchFamily="18" charset="0"/>
+                <a:cs typeface="Times New Roman" panose="02020603050405020304" pitchFamily="18" charset="0"/>
+              </a:rPr>
+              <a:t>QR Authentication &amp; Verification Logic Process</a:t>
             </a:r>
           </a:p>
           <a:p>
@@ -11016,7 +10825,7 @@
               <a:buChar char="Ø"/>
               <a:tabLst/>
             </a:pPr>
-            <a:endParaRPr kumimoji="0" lang="en-US" altLang="en-US" sz="1400" b="0" i="0" u="none" strike="noStrike" cap="none" normalizeH="0" baseline="0" dirty="0">
+            <a:endParaRPr kumimoji="0" lang="en-GB" altLang="en-US" sz="1400" b="1" i="0" u="none" strike="noStrike" cap="none" normalizeH="0" baseline="0" dirty="0">
               <a:ln>
                 <a:noFill/>
               </a:ln>
@@ -11038,11 +10847,11 @@
               <a:spcAft>
                 <a:spcPct val="0"/>
               </a:spcAft>
-              <a:buFont typeface="Arial" panose="020B0604020202020204" pitchFamily="34" charset="0"/>
-              <a:buChar char="•"/>
-            </a:pPr>
-            <a:r>
-              <a:rPr kumimoji="0" lang="en-US" altLang="en-US" sz="1400" b="0" i="0" u="none" strike="noStrike" cap="none" normalizeH="0" baseline="0" dirty="0">
+              <a:buFont typeface="Courier New" panose="02070309020205020404" pitchFamily="49" charset="0"/>
+              <a:buChar char="o"/>
+            </a:pPr>
+            <a:r>
+              <a:rPr kumimoji="0" lang="en-GB" altLang="en-US" sz="1400" b="1" i="0" u="none" strike="noStrike" cap="none" normalizeH="0" baseline="0" dirty="0">
                 <a:ln>
                   <a:noFill/>
                 </a:ln>
@@ -11055,47 +10864,10 @@
                 <a:latin typeface="Times New Roman" panose="02020603050405020304" pitchFamily="18" charset="0"/>
                 <a:cs typeface="Times New Roman" panose="02020603050405020304" pitchFamily="18" charset="0"/>
               </a:rPr>
-              <a:t>Traditional UIs require multiple clicks per student.</a:t>
-            </a:r>
-          </a:p>
-          <a:p>
-            <a:pPr marL="742950" lvl="1" indent="-285750" eaLnBrk="0" fontAlgn="base" hangingPunct="0">
-              <a:spcBef>
-                <a:spcPct val="0"/>
-              </a:spcBef>
-              <a:spcAft>
-                <a:spcPct val="0"/>
-              </a:spcAft>
-              <a:buFont typeface="Arial" panose="020B0604020202020204" pitchFamily="34" charset="0"/>
-              <a:buChar char="•"/>
-            </a:pPr>
-            <a:endParaRPr kumimoji="0" lang="en-US" altLang="en-US" sz="1400" b="0" i="0" u="none" strike="noStrike" cap="none" normalizeH="0" baseline="0" dirty="0">
-              <a:ln>
-                <a:noFill/>
-              </a:ln>
-              <a:solidFill>
-                <a:schemeClr val="accent2">
-                  <a:lumMod val="50000"/>
-                </a:schemeClr>
-              </a:solidFill>
-              <a:effectLst/>
-              <a:latin typeface="Times New Roman" panose="02020603050405020304" pitchFamily="18" charset="0"/>
-              <a:cs typeface="Times New Roman" panose="02020603050405020304" pitchFamily="18" charset="0"/>
-            </a:endParaRPr>
-          </a:p>
-          <a:p>
-            <a:pPr marL="742950" lvl="1" indent="-285750" eaLnBrk="0" fontAlgn="base" hangingPunct="0">
-              <a:spcBef>
-                <a:spcPct val="0"/>
-              </a:spcBef>
-              <a:spcAft>
-                <a:spcPct val="0"/>
-              </a:spcAft>
-              <a:buFont typeface="Arial" panose="020B0604020202020204" pitchFamily="34" charset="0"/>
-              <a:buChar char="•"/>
-            </a:pPr>
-            <a:r>
-              <a:rPr kumimoji="0" lang="en-US" altLang="en-US" sz="1400" b="0" i="0" u="none" strike="noStrike" cap="none" normalizeH="0" baseline="0" dirty="0">
+              <a:t>Generation: </a:t>
+            </a:r>
+            <a:r>
+              <a:rPr kumimoji="0" lang="en-GB" altLang="en-US" sz="1400" i="0" u="none" strike="noStrike" cap="none" normalizeH="0" baseline="0" dirty="0">
                 <a:ln>
                   <a:noFill/>
                 </a:ln>
@@ -11108,7 +10880,7 @@
                 <a:latin typeface="Times New Roman" panose="02020603050405020304" pitchFamily="18" charset="0"/>
                 <a:cs typeface="Times New Roman" panose="02020603050405020304" pitchFamily="18" charset="0"/>
               </a:rPr>
-              <a:t>NLP allows faculty to type a single sentence to mark outliers (absentees), while the system assumes the rest are present (Efficiency).</a:t>
+              <a:t>Creating dynamic, time-limited QR codes.</a:t>
             </a:r>
           </a:p>
           <a:p>
@@ -11119,10 +10891,98 @@
               <a:spcAft>
                 <a:spcPct val="0"/>
               </a:spcAft>
-              <a:buFont typeface="Arial" panose="020B0604020202020204" pitchFamily="34" charset="0"/>
-              <a:buChar char="•"/>
-            </a:pPr>
-            <a:endParaRPr kumimoji="0" lang="en-US" altLang="en-US" sz="1400" b="0" i="0" u="none" strike="noStrike" cap="none" normalizeH="0" baseline="0" dirty="0">
+              <a:buFont typeface="Courier New" panose="02070309020205020404" pitchFamily="49" charset="0"/>
+              <a:buChar char="o"/>
+            </a:pPr>
+            <a:r>
+              <a:rPr kumimoji="0" lang="en-GB" altLang="en-US" sz="1400" b="1" i="0" u="none" strike="noStrike" cap="none" normalizeH="0" baseline="0" dirty="0">
+                <a:ln>
+                  <a:noFill/>
+                </a:ln>
+                <a:solidFill>
+                  <a:schemeClr val="accent2">
+                    <a:lumMod val="50000"/>
+                  </a:schemeClr>
+                </a:solidFill>
+                <a:effectLst/>
+                <a:latin typeface="Times New Roman" panose="02020603050405020304" pitchFamily="18" charset="0"/>
+                <a:cs typeface="Times New Roman" panose="02020603050405020304" pitchFamily="18" charset="0"/>
+              </a:rPr>
+              <a:t>Hashing: </a:t>
+            </a:r>
+            <a:r>
+              <a:rPr kumimoji="0" lang="en-GB" altLang="en-US" sz="1400" i="0" u="none" strike="noStrike" cap="none" normalizeH="0" baseline="0" dirty="0">
+                <a:ln>
+                  <a:noFill/>
+                </a:ln>
+                <a:solidFill>
+                  <a:schemeClr val="accent2">
+                    <a:lumMod val="50000"/>
+                  </a:schemeClr>
+                </a:solidFill>
+                <a:effectLst/>
+                <a:latin typeface="Times New Roman" panose="02020603050405020304" pitchFamily="18" charset="0"/>
+                <a:cs typeface="Times New Roman" panose="02020603050405020304" pitchFamily="18" charset="0"/>
+              </a:rPr>
+              <a:t>Encrypting Student ID and Timestamp into the code.</a:t>
+            </a:r>
+          </a:p>
+          <a:p>
+            <a:pPr marL="742950" lvl="1" indent="-285750" eaLnBrk="0" fontAlgn="base" hangingPunct="0">
+              <a:spcBef>
+                <a:spcPct val="0"/>
+              </a:spcBef>
+              <a:spcAft>
+                <a:spcPct val="0"/>
+              </a:spcAft>
+              <a:buFont typeface="Courier New" panose="02070309020205020404" pitchFamily="49" charset="0"/>
+              <a:buChar char="o"/>
+            </a:pPr>
+            <a:r>
+              <a:rPr kumimoji="0" lang="en-GB" altLang="en-US" sz="1400" b="1" i="0" u="none" strike="noStrike" cap="none" normalizeH="0" baseline="0" dirty="0">
+                <a:ln>
+                  <a:noFill/>
+                </a:ln>
+                <a:solidFill>
+                  <a:schemeClr val="accent2">
+                    <a:lumMod val="50000"/>
+                  </a:schemeClr>
+                </a:solidFill>
+                <a:effectLst/>
+                <a:latin typeface="Times New Roman" panose="02020603050405020304" pitchFamily="18" charset="0"/>
+                <a:cs typeface="Times New Roman" panose="02020603050405020304" pitchFamily="18" charset="0"/>
+              </a:rPr>
+              <a:t>Validation: </a:t>
+            </a:r>
+            <a:r>
+              <a:rPr kumimoji="0" lang="en-GB" altLang="en-US" sz="1400" i="0" u="none" strike="noStrike" cap="none" normalizeH="0" baseline="0" dirty="0">
+                <a:ln>
+                  <a:noFill/>
+                </a:ln>
+                <a:solidFill>
+                  <a:schemeClr val="accent2">
+                    <a:lumMod val="50000"/>
+                  </a:schemeClr>
+                </a:solidFill>
+                <a:effectLst/>
+                <a:latin typeface="Times New Roman" panose="02020603050405020304" pitchFamily="18" charset="0"/>
+                <a:cs typeface="Times New Roman" panose="02020603050405020304" pitchFamily="18" charset="0"/>
+              </a:rPr>
+              <a:t>Matching the scan location/time with the predefined Class Schedule.</a:t>
+            </a:r>
+          </a:p>
+          <a:p>
+            <a:pPr marL="742950" lvl="1" indent="-285750" eaLnBrk="0" fontAlgn="base" hangingPunct="0">
+              <a:spcBef>
+                <a:spcPct val="0"/>
+              </a:spcBef>
+              <a:spcAft>
+                <a:spcPct val="0"/>
+              </a:spcAft>
+              <a:buFont typeface="Courier New" panose="02070309020205020404" pitchFamily="49" charset="0"/>
+              <a:buChar char="o"/>
+            </a:pPr>
+            <a:endParaRPr kumimoji="0" lang="en-US" altLang="en-US" sz="1400" i="0" u="none" strike="noStrike" cap="none" normalizeH="0" baseline="0" dirty="0">
               <a:ln>
                 <a:noFill/>
               </a:ln>
@@ -11611,8 +11471,8 @@
         </p:nvSpPr>
         <p:spPr bwMode="auto">
           <a:xfrm rot="10800000" flipV="1">
-            <a:off x="149087" y="1168999"/>
-            <a:ext cx="8845826" cy="3785652"/>
+            <a:off x="149087" y="1292110"/>
+            <a:ext cx="8845826" cy="3539430"/>
           </a:xfrm>
           <a:prstGeom prst="rect">
             <a:avLst/>
@@ -12039,50 +11899,6 @@
               <a:latin typeface="Times New Roman" panose="02020603050405020304" pitchFamily="18" charset="0"/>
               <a:cs typeface="Times New Roman" panose="02020603050405020304" pitchFamily="18" charset="0"/>
             </a:endParaRPr>
-          </a:p>
-          <a:p>
-            <a:pPr marL="742950" lvl="1" indent="-285750" eaLnBrk="0" fontAlgn="base" hangingPunct="0">
-              <a:spcBef>
-                <a:spcPct val="0"/>
-              </a:spcBef>
-              <a:spcAft>
-                <a:spcPct val="0"/>
-              </a:spcAft>
-              <a:buFont typeface="Arial" panose="020B0604020202020204" pitchFamily="34" charset="0"/>
-              <a:buChar char="•"/>
-            </a:pPr>
-            <a:r>
-              <a:rPr kumimoji="0" lang="en-US" altLang="en-US" sz="1600" b="1" i="0" u="none" strike="noStrike" cap="none" normalizeH="0" baseline="0" dirty="0">
-                <a:ln>
-                  <a:noFill/>
-                </a:ln>
-                <a:solidFill>
-                  <a:schemeClr val="accent2">
-                    <a:lumMod val="50000"/>
-                  </a:schemeClr>
-                </a:solidFill>
-                <a:effectLst/>
-                <a:latin typeface="Times New Roman" panose="02020603050405020304" pitchFamily="18" charset="0"/>
-                <a:cs typeface="Times New Roman" panose="02020603050405020304" pitchFamily="18" charset="0"/>
-              </a:rPr>
-              <a:t>NLP Model:</a:t>
-            </a:r>
-            <a:r>
-              <a:rPr kumimoji="0" lang="en-US" altLang="en-US" sz="1600" b="0" i="0" u="none" strike="noStrike" cap="none" normalizeH="0" baseline="0" dirty="0">
-                <a:ln>
-                  <a:noFill/>
-                </a:ln>
-                <a:solidFill>
-                  <a:schemeClr val="accent2">
-                    <a:lumMod val="50000"/>
-                  </a:schemeClr>
-                </a:solidFill>
-                <a:effectLst/>
-                <a:latin typeface="Times New Roman" panose="02020603050405020304" pitchFamily="18" charset="0"/>
-                <a:cs typeface="Times New Roman" panose="02020603050405020304" pitchFamily="18" charset="0"/>
-              </a:rPr>
-              <a:t> String parsing for chatbot interactions.</a:t>
-            </a:r>
           </a:p>
           <a:p>
             <a:pPr marL="0" marR="0" lvl="0" indent="0" algn="l" defTabSz="914400" rtl="0" eaLnBrk="0" fontAlgn="base" latinLnBrk="0" hangingPunct="0">
@@ -12265,7 +12081,7 @@
         <p:spPr bwMode="auto">
           <a:xfrm>
             <a:off x="198783" y="1278014"/>
-            <a:ext cx="8229600" cy="3539430"/>
+            <a:ext cx="8229600" cy="3293209"/>
           </a:xfrm>
           <a:prstGeom prst="rect">
             <a:avLst/>
@@ -12386,7 +12202,7 @@
                 <a:latin typeface="Times New Roman" panose="02020603050405020304" pitchFamily="18" charset="0"/>
                 <a:cs typeface="Times New Roman" panose="02020603050405020304" pitchFamily="18" charset="0"/>
               </a:rPr>
-              <a:t> Implementing QR generation, manual logs, and the NLP text-parser.</a:t>
+              <a:t> Implementing QR generation, manual logs.</a:t>
             </a:r>
           </a:p>
           <a:p>
@@ -12720,8 +12536,8 @@
         </p:nvSpPr>
         <p:spPr bwMode="auto">
           <a:xfrm rot="10800000" flipV="1">
-            <a:off x="66039" y="1247688"/>
-            <a:ext cx="8975035" cy="3323987"/>
+            <a:off x="66039" y="1355410"/>
+            <a:ext cx="8975035" cy="3108543"/>
           </a:xfrm>
           <a:prstGeom prst="rect">
             <a:avLst/>
@@ -13039,50 +12855,6 @@
               <a:latin typeface="Times New Roman" panose="02020603050405020304" pitchFamily="18" charset="0"/>
               <a:cs typeface="Times New Roman" panose="02020603050405020304" pitchFamily="18" charset="0"/>
             </a:endParaRPr>
-          </a:p>
-          <a:p>
-            <a:pPr marL="742950" lvl="1" indent="-285750" eaLnBrk="0" fontAlgn="base" hangingPunct="0">
-              <a:spcBef>
-                <a:spcPct val="0"/>
-              </a:spcBef>
-              <a:spcAft>
-                <a:spcPct val="0"/>
-              </a:spcAft>
-              <a:buFont typeface="Arial" panose="020B0604020202020204" pitchFamily="34" charset="0"/>
-              <a:buChar char="•"/>
-            </a:pPr>
-            <a:r>
-              <a:rPr kumimoji="0" lang="en-US" altLang="en-US" sz="1400" b="1" i="0" u="none" strike="noStrike" cap="none" normalizeH="0" baseline="0" dirty="0">
-                <a:ln>
-                  <a:noFill/>
-                </a:ln>
-                <a:solidFill>
-                  <a:schemeClr val="accent2">
-                    <a:lumMod val="50000"/>
-                  </a:schemeClr>
-                </a:solidFill>
-                <a:effectLst/>
-                <a:latin typeface="Times New Roman" panose="02020603050405020304" pitchFamily="18" charset="0"/>
-                <a:cs typeface="Times New Roman" panose="02020603050405020304" pitchFamily="18" charset="0"/>
-              </a:rPr>
-              <a:t>NLP Tools:</a:t>
-            </a:r>
-            <a:r>
-              <a:rPr kumimoji="0" lang="en-US" altLang="en-US" sz="1400" b="0" i="0" u="none" strike="noStrike" cap="none" normalizeH="0" baseline="0" dirty="0">
-                <a:ln>
-                  <a:noFill/>
-                </a:ln>
-                <a:solidFill>
-                  <a:schemeClr val="accent2">
-                    <a:lumMod val="50000"/>
-                  </a:schemeClr>
-                </a:solidFill>
-                <a:effectLst/>
-                <a:latin typeface="Times New Roman" panose="02020603050405020304" pitchFamily="18" charset="0"/>
-                <a:cs typeface="Times New Roman" panose="02020603050405020304" pitchFamily="18" charset="0"/>
-              </a:rPr>
-              <a:t> Compromised NLP service or custom Regex-based parser for attendance commands.</a:t>
-            </a:r>
           </a:p>
           <a:p>
             <a:pPr marL="742950" lvl="1" indent="-285750" eaLnBrk="0" fontAlgn="base" hangingPunct="0">
